--- a/public/docs/Figma.pptx
+++ b/public/docs/Figma.pptx
@@ -13875,7 +13875,7 @@
       </p:sp>
       <p:pic>
         <p:nvPicPr>
-          <p:cNvPr id="1026" name="Picture 2"/>
+          <p:cNvPr id="2" name="Picture 2"/>
           <p:cNvPicPr>
             <a:picLocks noChangeAspect="1" noChangeArrowheads="1"/>
           </p:cNvPicPr>
@@ -13896,8 +13896,8 @@
         </p:blipFill>
         <p:spPr bwMode="auto">
           <a:xfrm>
-            <a:off x="539552" y="2047874"/>
-            <a:ext cx="8064896" cy="3757389"/>
+            <a:off x="822325" y="1772816"/>
+            <a:ext cx="7499350" cy="4254500"/>
           </a:xfrm>
           <a:prstGeom prst="rect">
             <a:avLst/>
@@ -13939,7 +13939,7 @@
       </p:pic>
       <p:pic>
         <p:nvPicPr>
-          <p:cNvPr id="1027" name="Picture 3"/>
+          <p:cNvPr id="4" name="Picture 3"/>
           <p:cNvPicPr>
             <a:picLocks noChangeAspect="1" noChangeArrowheads="1"/>
           </p:cNvPicPr>
@@ -13960,8 +13960,8 @@
         </p:blipFill>
         <p:spPr bwMode="auto">
           <a:xfrm>
-            <a:off x="1907704" y="692696"/>
-            <a:ext cx="4924425" cy="447675"/>
+            <a:off x="5076056" y="260648"/>
+            <a:ext cx="3952875" cy="1400175"/>
           </a:xfrm>
           <a:prstGeom prst="rect">
             <a:avLst/>
@@ -14001,6 +14001,34 @@
           </a:extLst>
         </p:spPr>
       </p:pic>
+      <p:sp>
+        <p:nvSpPr>
+          <p:cNvPr id="5" name="Rectangle 4"/>
+          <p:cNvSpPr/>
+          <p:nvPr/>
+        </p:nvSpPr>
+        <p:spPr>
+          <a:xfrm>
+            <a:off x="1781403" y="256957"/>
+            <a:ext cx="2826415" cy="369332"/>
+          </a:xfrm>
+          <a:prstGeom prst="rect">
+            <a:avLst/>
+          </a:prstGeom>
+        </p:spPr>
+        <p:txBody>
+          <a:bodyPr wrap="none">
+            <a:spAutoFit/>
+          </a:bodyPr>
+          <a:lstStyle/>
+          <a:p>
+            <a:r>
+              <a:rPr lang="fr-FR" dirty="0"/>
+              <a:t>principales fonctionnalités</a:t>
+            </a:r>
+          </a:p>
+        </p:txBody>
+      </p:sp>
     </p:spTree>
     <p:extLst>
       <p:ext uri="{BB962C8B-B14F-4D97-AF65-F5344CB8AC3E}">
